--- a/demo_site/files/slides/lecture11_hashtables2.pptx
+++ b/demo_site/files/slides/lecture11_hashtables2.pptx
@@ -5,10 +5,10 @@
     <p:sldMasterId id="2147483648" r:id="rId1"/>
   </p:sldMasterIdLst>
   <p:notesMasterIdLst>
-    <p:notesMasterId r:id="rId34"/>
+    <p:notesMasterId r:id="rId35"/>
   </p:notesMasterIdLst>
   <p:handoutMasterIdLst>
-    <p:handoutMasterId r:id="rId35"/>
+    <p:handoutMasterId r:id="rId36"/>
   </p:handoutMasterIdLst>
   <p:sldIdLst>
     <p:sldId id="256" r:id="rId2"/>
@@ -43,20 +43,21 @@
     <p:sldId id="369" r:id="rId31"/>
     <p:sldId id="376" r:id="rId32"/>
     <p:sldId id="377" r:id="rId33"/>
+    <p:sldId id="380" r:id="rId34"/>
   </p:sldIdLst>
   <p:sldSz cx="12192000" cy="6858000"/>
   <p:notesSz cx="6858000" cy="9144000"/>
   <p:embeddedFontLst>
     <p:embeddedFont>
       <p:font typeface="Cambria Math" panose="02040503050406030204" pitchFamily="18" charset="0"/>
-      <p:regular r:id="rId36"/>
+      <p:regular r:id="rId37"/>
     </p:embeddedFont>
     <p:embeddedFont>
       <p:font typeface="Consolas" panose="020B0609020204030204" pitchFamily="49" charset="0"/>
-      <p:regular r:id="rId37"/>
-      <p:bold r:id="rId38"/>
-      <p:italic r:id="rId39"/>
-      <p:boldItalic r:id="rId40"/>
+      <p:regular r:id="rId38"/>
+      <p:bold r:id="rId39"/>
+      <p:italic r:id="rId40"/>
+      <p:boldItalic r:id="rId41"/>
     </p:embeddedFont>
   </p:embeddedFontLst>
   <p:defaultTextStyle>
@@ -265,7 +266,7 @@
           <a:p>
             <a:fld id="{83643542-CF0C-48D3-A91E-34CCD96FC74F}" type="datetimeFigureOut">
               <a:rPr lang="en-US" smtClean="0"/>
-              <a:t>4/22/2026</a:t>
+              <a:t>4/23/2026</a:t>
             </a:fld>
             <a:endParaRPr lang="en-US"/>
           </a:p>
@@ -442,7 +443,7 @@
           <a:p>
             <a:fld id="{E70D1F59-0C63-44D8-BE72-2266A9516CA1}" type="datetimeFigureOut">
               <a:rPr lang="en-US" smtClean="0"/>
-              <a:t>4/22/2026</a:t>
+              <a:t>4/23/2026</a:t>
             </a:fld>
             <a:endParaRPr lang="en-US"/>
           </a:p>
@@ -856,7 +857,7 @@
           <a:p>
             <a:fld id="{2DB93FBE-67AC-4C5C-B62E-CFFDEAF9BE53}" type="datetimeFigureOut">
               <a:rPr lang="en-US" smtClean="0"/>
-              <a:t>4/22/2026</a:t>
+              <a:t>4/23/2026</a:t>
             </a:fld>
             <a:endParaRPr lang="en-US"/>
           </a:p>
@@ -1054,7 +1055,7 @@
           <a:p>
             <a:fld id="{2DB93FBE-67AC-4C5C-B62E-CFFDEAF9BE53}" type="datetimeFigureOut">
               <a:rPr lang="en-US" smtClean="0"/>
-              <a:t>4/22/2026</a:t>
+              <a:t>4/23/2026</a:t>
             </a:fld>
             <a:endParaRPr lang="en-US"/>
           </a:p>
@@ -1262,7 +1263,7 @@
           <a:p>
             <a:fld id="{2DB93FBE-67AC-4C5C-B62E-CFFDEAF9BE53}" type="datetimeFigureOut">
               <a:rPr lang="en-US" smtClean="0"/>
-              <a:t>4/22/2026</a:t>
+              <a:t>4/23/2026</a:t>
             </a:fld>
             <a:endParaRPr lang="en-US"/>
           </a:p>
@@ -1460,7 +1461,7 @@
           <a:p>
             <a:fld id="{2DB93FBE-67AC-4C5C-B62E-CFFDEAF9BE53}" type="datetimeFigureOut">
               <a:rPr lang="en-US" smtClean="0"/>
-              <a:t>4/22/2026</a:t>
+              <a:t>4/23/2026</a:t>
             </a:fld>
             <a:endParaRPr lang="en-US"/>
           </a:p>
@@ -1735,7 +1736,7 @@
           <a:p>
             <a:fld id="{2DB93FBE-67AC-4C5C-B62E-CFFDEAF9BE53}" type="datetimeFigureOut">
               <a:rPr lang="en-US" smtClean="0"/>
-              <a:t>4/22/2026</a:t>
+              <a:t>4/23/2026</a:t>
             </a:fld>
             <a:endParaRPr lang="en-US"/>
           </a:p>
@@ -2000,7 +2001,7 @@
           <a:p>
             <a:fld id="{2DB93FBE-67AC-4C5C-B62E-CFFDEAF9BE53}" type="datetimeFigureOut">
               <a:rPr lang="en-US" smtClean="0"/>
-              <a:t>4/22/2026</a:t>
+              <a:t>4/23/2026</a:t>
             </a:fld>
             <a:endParaRPr lang="en-US"/>
           </a:p>
@@ -2412,7 +2413,7 @@
           <a:p>
             <a:fld id="{2DB93FBE-67AC-4C5C-B62E-CFFDEAF9BE53}" type="datetimeFigureOut">
               <a:rPr lang="en-US" smtClean="0"/>
-              <a:t>4/22/2026</a:t>
+              <a:t>4/23/2026</a:t>
             </a:fld>
             <a:endParaRPr lang="en-US"/>
           </a:p>
@@ -2553,7 +2554,7 @@
           <a:p>
             <a:fld id="{2DB93FBE-67AC-4C5C-B62E-CFFDEAF9BE53}" type="datetimeFigureOut">
               <a:rPr lang="en-US" smtClean="0"/>
-              <a:t>4/22/2026</a:t>
+              <a:t>4/23/2026</a:t>
             </a:fld>
             <a:endParaRPr lang="en-US"/>
           </a:p>
@@ -2666,7 +2667,7 @@
           <a:p>
             <a:fld id="{2DB93FBE-67AC-4C5C-B62E-CFFDEAF9BE53}" type="datetimeFigureOut">
               <a:rPr lang="en-US" smtClean="0"/>
-              <a:t>4/22/2026</a:t>
+              <a:t>4/23/2026</a:t>
             </a:fld>
             <a:endParaRPr lang="en-US"/>
           </a:p>
@@ -2977,7 +2978,7 @@
           <a:p>
             <a:fld id="{2DB93FBE-67AC-4C5C-B62E-CFFDEAF9BE53}" type="datetimeFigureOut">
               <a:rPr lang="en-US" smtClean="0"/>
-              <a:t>4/22/2026</a:t>
+              <a:t>4/23/2026</a:t>
             </a:fld>
             <a:endParaRPr lang="en-US"/>
           </a:p>
@@ -3265,7 +3266,7 @@
           <a:p>
             <a:fld id="{2DB93FBE-67AC-4C5C-B62E-CFFDEAF9BE53}" type="datetimeFigureOut">
               <a:rPr lang="en-US" smtClean="0"/>
-              <a:t>4/22/2026</a:t>
+              <a:t>4/23/2026</a:t>
             </a:fld>
             <a:endParaRPr lang="en-US"/>
           </a:p>
@@ -3506,7 +3507,7 @@
           <a:p>
             <a:fld id="{2DB93FBE-67AC-4C5C-B62E-CFFDEAF9BE53}" type="datetimeFigureOut">
               <a:rPr lang="en-US" smtClean="0"/>
-              <a:t>4/22/2026</a:t>
+              <a:t>4/23/2026</a:t>
             </a:fld>
             <a:endParaRPr lang="en-US"/>
           </a:p>
@@ -44796,6 +44797,258 @@
 </p:sld>
 </file>
 
+<file path=ppt/slides/slide33.xml><?xml version="1.0" encoding="utf-8"?>
+<p:sld xmlns:a="http://schemas.openxmlformats.org/drawingml/2006/main" xmlns:r="http://schemas.openxmlformats.org/officeDocument/2006/relationships" xmlns:p="http://schemas.openxmlformats.org/presentationml/2006/main">
+  <p:cSld>
+    <p:spTree>
+      <p:nvGrpSpPr>
+        <p:cNvPr id="1" name=""/>
+        <p:cNvGrpSpPr/>
+        <p:nvPr/>
+      </p:nvGrpSpPr>
+      <p:grpSpPr>
+        <a:xfrm>
+          <a:off x="0" y="0"/>
+          <a:ext cx="0" cy="0"/>
+          <a:chOff x="0" y="0"/>
+          <a:chExt cx="0" cy="0"/>
+        </a:xfrm>
+      </p:grpSpPr>
+      <p:sp>
+        <p:nvSpPr>
+          <p:cNvPr id="2" name="Title 1">
+            <a:extLst>
+              <a:ext uri="{FF2B5EF4-FFF2-40B4-BE49-F238E27FC236}">
+                <a16:creationId xmlns:a16="http://schemas.microsoft.com/office/drawing/2014/main" id="{26348504-CA46-CA67-A734-8DDC6861F802}"/>
+              </a:ext>
+            </a:extLst>
+          </p:cNvPr>
+          <p:cNvSpPr>
+            <a:spLocks noGrp="1"/>
+          </p:cNvSpPr>
+          <p:nvPr>
+            <p:ph type="title"/>
+          </p:nvPr>
+        </p:nvSpPr>
+        <p:spPr/>
+        <p:txBody>
+          <a:bodyPr/>
+          <a:lstStyle/>
+          <a:p>
+            <a:r>
+              <a:rPr lang="en-US" dirty="0"/>
+              <a:t>Rehashing</a:t>
+            </a:r>
+          </a:p>
+        </p:txBody>
+      </p:sp>
+      <mc:AlternateContent xmlns:mc="http://schemas.openxmlformats.org/markup-compatibility/2006" xmlns:a14="http://schemas.microsoft.com/office/drawing/2010/main">
+        <mc:Choice Requires="a14">
+          <p:sp>
+            <p:nvSpPr>
+              <p:cNvPr id="3" name="Content Placeholder 2">
+                <a:extLst>
+                  <a:ext uri="{FF2B5EF4-FFF2-40B4-BE49-F238E27FC236}">
+                    <a16:creationId xmlns:a16="http://schemas.microsoft.com/office/drawing/2014/main" id="{7456C4D0-09F9-C2D9-56AC-4F81B37D1B7A}"/>
+                  </a:ext>
+                </a:extLst>
+              </p:cNvPr>
+              <p:cNvSpPr>
+                <a:spLocks noGrp="1"/>
+              </p:cNvSpPr>
+              <p:nvPr>
+                <p:ph idx="1"/>
+              </p:nvPr>
+            </p:nvSpPr>
+            <p:spPr/>
+            <p:txBody>
+              <a:bodyPr>
+                <a:normAutofit/>
+              </a:bodyPr>
+              <a:lstStyle/>
+              <a:p>
+                <a:r>
+                  <a:rPr lang="en-US" dirty="0"/>
+                  <a:t>If your load factor </a:t>
+                </a:r>
+                <a14:m>
+                  <m:oMath xmlns:m="http://schemas.openxmlformats.org/officeDocument/2006/math">
+                    <m:r>
+                      <a:rPr lang="en-US" b="0" i="1" smtClean="0">
+                        <a:latin typeface="Cambria Math" panose="02040503050406030204" pitchFamily="18" charset="0"/>
+                      </a:rPr>
+                      <m:t>𝜆</m:t>
+                    </m:r>
+                  </m:oMath>
+                </a14:m>
+                <a:r>
+                  <a:rPr lang="en-US" dirty="0"/>
+                  <a:t> gets too large, copy everything over to a larger hash table</a:t>
+                </a:r>
+              </a:p>
+              <a:p>
+                <a:pPr lvl="1"/>
+                <a:r>
+                  <a:rPr lang="en-US" dirty="0"/>
+                  <a:t>To do this: make a new, larger array</a:t>
+                </a:r>
+              </a:p>
+              <a:p>
+                <a:pPr lvl="1"/>
+                <a:r>
+                  <a:rPr lang="en-US" dirty="0"/>
+                  <a:t>Re-insert all items into the new hash table by reapplying the hash function</a:t>
+                </a:r>
+              </a:p>
+              <a:p>
+                <a:pPr lvl="2"/>
+                <a:r>
+                  <a:rPr lang="en-US" dirty="0"/>
+                  <a:t>We need to reapply the hash function because items should map to a different index</a:t>
+                </a:r>
+              </a:p>
+              <a:p>
+                <a:pPr lvl="1"/>
+                <a:r>
+                  <a:rPr lang="en-US" dirty="0"/>
+                  <a:t>New array should be “roughly” double the length (but probably still want it to be prime)</a:t>
+                </a:r>
+              </a:p>
+              <a:p>
+                <a:r>
+                  <a:rPr lang="en-US" dirty="0"/>
+                  <a:t>What does “too large” mean?</a:t>
+                </a:r>
+              </a:p>
+              <a:p>
+                <a:pPr lvl="1"/>
+                <a:r>
+                  <a:rPr lang="en-US" dirty="0"/>
+                  <a:t>For separate chaining, typically we want </a:t>
+                </a:r>
+                <a14:m>
+                  <m:oMath xmlns:m="http://schemas.openxmlformats.org/officeDocument/2006/math">
+                    <m:r>
+                      <a:rPr lang="en-US" b="0" i="1" smtClean="0">
+                        <a:latin typeface="Cambria Math" panose="02040503050406030204" pitchFamily="18" charset="0"/>
+                      </a:rPr>
+                      <m:t>𝜆</m:t>
+                    </m:r>
+                    <m:r>
+                      <a:rPr lang="en-US" b="0" i="1" smtClean="0">
+                        <a:latin typeface="Cambria Math" panose="02040503050406030204" pitchFamily="18" charset="0"/>
+                      </a:rPr>
+                      <m:t>&lt;2</m:t>
+                    </m:r>
+                  </m:oMath>
+                </a14:m>
+                <a:endParaRPr lang="en-US" dirty="0"/>
+              </a:p>
+              <a:p>
+                <a:pPr lvl="1"/>
+                <a:r>
+                  <a:rPr lang="en-US" dirty="0"/>
+                  <a:t>For open addressing, typically we want </a:t>
+                </a:r>
+                <a14:m>
+                  <m:oMath xmlns:m="http://schemas.openxmlformats.org/officeDocument/2006/math">
+                    <m:r>
+                      <a:rPr lang="en-US" b="0" i="1" smtClean="0">
+                        <a:latin typeface="Cambria Math" panose="02040503050406030204" pitchFamily="18" charset="0"/>
+                      </a:rPr>
+                      <m:t>𝜆</m:t>
+                    </m:r>
+                    <m:r>
+                      <a:rPr lang="en-US" b="0" i="1" smtClean="0">
+                        <a:latin typeface="Cambria Math" panose="02040503050406030204" pitchFamily="18" charset="0"/>
+                      </a:rPr>
+                      <m:t>&lt;</m:t>
+                    </m:r>
+                    <m:f>
+                      <m:fPr>
+                        <m:ctrlPr>
+                          <a:rPr lang="en-US" b="0" i="1" smtClean="0">
+                            <a:latin typeface="Cambria Math" panose="02040503050406030204" pitchFamily="18" charset="0"/>
+                          </a:rPr>
+                        </m:ctrlPr>
+                      </m:fPr>
+                      <m:num>
+                        <m:r>
+                          <a:rPr lang="en-US" b="0" i="1" smtClean="0">
+                            <a:latin typeface="Cambria Math" panose="02040503050406030204" pitchFamily="18" charset="0"/>
+                          </a:rPr>
+                          <m:t>1</m:t>
+                        </m:r>
+                      </m:num>
+                      <m:den>
+                        <m:r>
+                          <a:rPr lang="en-US" b="0" i="1" smtClean="0">
+                            <a:latin typeface="Cambria Math" panose="02040503050406030204" pitchFamily="18" charset="0"/>
+                          </a:rPr>
+                          <m:t>2</m:t>
+                        </m:r>
+                      </m:den>
+                    </m:f>
+                  </m:oMath>
+                </a14:m>
+                <a:endParaRPr lang="en-US" dirty="0"/>
+              </a:p>
+            </p:txBody>
+          </p:sp>
+        </mc:Choice>
+        <mc:Fallback xmlns="">
+          <p:sp>
+            <p:nvSpPr>
+              <p:cNvPr id="3" name="Content Placeholder 2">
+                <a:extLst>
+                  <a:ext uri="{FF2B5EF4-FFF2-40B4-BE49-F238E27FC236}">
+                    <a16:creationId xmlns:a16="http://schemas.microsoft.com/office/drawing/2014/main" id="{7456C4D0-09F9-C2D9-56AC-4F81B37D1B7A}"/>
+                  </a:ext>
+                </a:extLst>
+              </p:cNvPr>
+              <p:cNvSpPr>
+                <a:spLocks noGrp="1" noRot="1" noChangeAspect="1" noMove="1" noResize="1" noEditPoints="1" noAdjustHandles="1" noChangeArrowheads="1" noChangeShapeType="1" noTextEdit="1"/>
+              </p:cNvSpPr>
+              <p:nvPr>
+                <p:ph idx="1"/>
+              </p:nvPr>
+            </p:nvSpPr>
+            <p:spPr>
+              <a:blipFill>
+                <a:blip r:embed="rId2"/>
+                <a:stretch>
+                  <a:fillRect l="-1043" t="-2241" r="-812"/>
+                </a:stretch>
+              </a:blipFill>
+            </p:spPr>
+            <p:txBody>
+              <a:bodyPr/>
+              <a:lstStyle/>
+              <a:p>
+                <a:r>
+                  <a:rPr lang="en-US">
+                    <a:noFill/>
+                  </a:rPr>
+                  <a:t> </a:t>
+                </a:r>
+              </a:p>
+            </p:txBody>
+          </p:sp>
+        </mc:Fallback>
+      </mc:AlternateContent>
+    </p:spTree>
+    <p:extLst>
+      <p:ext uri="{BB962C8B-B14F-4D97-AF65-F5344CB8AC3E}">
+        <p14:creationId xmlns:p14="http://schemas.microsoft.com/office/powerpoint/2010/main" val="854344961"/>
+      </p:ext>
+    </p:extLst>
+  </p:cSld>
+  <p:clrMapOvr>
+    <a:masterClrMapping/>
+  </p:clrMapOvr>
+</p:sld>
+</file>
+
 <file path=ppt/slides/slide4.xml><?xml version="1.0" encoding="utf-8"?>
 <p:sld xmlns:a="http://schemas.openxmlformats.org/drawingml/2006/main" xmlns:r="http://schemas.openxmlformats.org/officeDocument/2006/relationships" xmlns:p="http://schemas.openxmlformats.org/presentationml/2006/main">
   <p:cSld>
